--- a/dist/초1/도덕·윤리/책임과돌봄/초1_도덕·윤리_책임과돌봄_01_맡은일과배려_학생용.pptx
+++ b/dist/초1/도덕·윤리/책임과돌봄/초1_도덕·윤리_책임과돌봄_01_맡은일과배려_학생용.pptx
@@ -120,20 +120,20 @@
   <p:extLst>
     <p:ext uri="{521415D9-36F7-43E2-AB2F-B90AF26B5E84}">
       <p14:sectionLst xmlns:p14="http://schemas.microsoft.com/office/powerpoint/2010/main">
-        <p14:section name="도입" id="{961efd91-afcd-74f9-a2ab-f37b751abedb}">
+        <p14:section name="도입" id="{44d60028-80d6-cd3b-63de-de1b784133c4}">
           <p14:sldIdLst>
             <p14:sldId id="256"/>
             <p14:sldId id="257"/>
           </p14:sldIdLst>
         </p14:section>
-        <p14:section name="개념" id="{24ef941e-4e66-36ae-51df-2d53ed47216e}">
+        <p14:section name="개념" id="{fb5a4b18-d531-4d4f-d50e-c0de99ba86cc}">
           <p14:sldIdLst>
             <p14:sldId id="258"/>
             <p14:sldId id="259"/>
             <p14:sldId id="261"/>
           </p14:sldIdLst>
         </p14:section>
-        <p14:section name="연습" id="{d7f409c8-b054-9a2c-9356-51e4e7c0754e}">
+        <p14:section name="연습" id="{f6fdbfc4-4da0-b93b-07a6-32a41f88913a}">
           <p14:sldIdLst>
             <p14:sldId id="260"/>
             <p14:sldId id="262"/>
@@ -141,25 +141,25 @@
             <p14:sldId id="264"/>
           </p14:sldIdLst>
         </p14:section>
-        <p14:section name="개념" id="{5bf19216-1071-f283-44e7-458376de77c9}">
+        <p14:section name="개념" id="{dab8c7fb-b996-76f7-cd4f-f613ac254dc6}">
           <p14:sldIdLst/>
         </p14:section>
-        <p14:section name="연습" id="{abebfdd4-95c3-e660-adf8-0373ac71777e}">
+        <p14:section name="연습" id="{1d8fdff4-9a2d-fd2d-aadc-49bd1c89abb4}">
           <p14:sldIdLst/>
         </p14:section>
-        <p14:section name="확인" id="{5e46efc1-9f29-d71e-0c19-e289127b35e8}">
+        <p14:section name="확인" id="{e553da3e-86fe-850f-c36a-b4a921670dce}">
           <p14:sldIdLst>
             <p14:sldId id="265"/>
             <p14:sldId id="266"/>
             <p14:sldId id="267"/>
           </p14:sldIdLst>
         </p14:section>
-        <p14:section name="정리" id="{3d19cd8c-86ff-15ce-0d3a-27cfb7033d72}">
+        <p14:section name="정리" id="{91f8d1cc-9e1d-2485-60d9-8e3c26bebb3e}">
           <p14:sldIdLst>
             <p14:sldId id="268"/>
           </p14:sldIdLst>
         </p14:section>
-        <p14:section name="보충" id="{3fa85297-4b0d-5b59-40d7-16e356d97911}">
+        <p14:section name="보충" id="{bbaba4ea-b43b-98a5-df3f-09333abcabb0}">
           <p14:sldIdLst>
             <p14:sldId id="269"/>
           </p14:sldIdLst>

--- a/dist/초1/도덕·윤리/책임과돌봄/초1_도덕·윤리_책임과돌봄_01_맡은일과배려_학생용.pptx
+++ b/dist/초1/도덕·윤리/책임과돌봄/초1_도덕·윤리_책임과돌봄_01_맡은일과배려_학생용.pptx
@@ -120,20 +120,20 @@
   <p:extLst>
     <p:ext uri="{521415D9-36F7-43E2-AB2F-B90AF26B5E84}">
       <p14:sectionLst xmlns:p14="http://schemas.microsoft.com/office/powerpoint/2010/main">
-        <p14:section name="도입" id="{44d60028-80d6-cd3b-63de-de1b784133c4}">
+        <p14:section name="도입" id="{780c6acc-0adb-3c02-61b3-3a7072081e66}">
           <p14:sldIdLst>
             <p14:sldId id="256"/>
             <p14:sldId id="257"/>
           </p14:sldIdLst>
         </p14:section>
-        <p14:section name="개념" id="{fb5a4b18-d531-4d4f-d50e-c0de99ba86cc}">
+        <p14:section name="개념" id="{6292e76a-cb0f-f234-8a1b-bbaa96cf3ff8}">
           <p14:sldIdLst>
             <p14:sldId id="258"/>
             <p14:sldId id="259"/>
             <p14:sldId id="261"/>
           </p14:sldIdLst>
         </p14:section>
-        <p14:section name="연습" id="{f6fdbfc4-4da0-b93b-07a6-32a41f88913a}">
+        <p14:section name="연습" id="{84e17049-5448-cfc1-b558-4a2bf7dd5274}">
           <p14:sldIdLst>
             <p14:sldId id="260"/>
             <p14:sldId id="262"/>
@@ -141,25 +141,25 @@
             <p14:sldId id="264"/>
           </p14:sldIdLst>
         </p14:section>
-        <p14:section name="개념" id="{dab8c7fb-b996-76f7-cd4f-f613ac254dc6}">
+        <p14:section name="개념" id="{d5499b91-dd4e-52b8-0fc9-601efc7fe3be}">
           <p14:sldIdLst/>
         </p14:section>
-        <p14:section name="연습" id="{1d8fdff4-9a2d-fd2d-aadc-49bd1c89abb4}">
+        <p14:section name="연습" id="{dd8b5908-2d04-1118-b2cd-e6475bc057d7}">
           <p14:sldIdLst/>
         </p14:section>
-        <p14:section name="확인" id="{e553da3e-86fe-850f-c36a-b4a921670dce}">
+        <p14:section name="확인" id="{0334f8e1-d853-985f-dc15-9175673e4903}">
           <p14:sldIdLst>
             <p14:sldId id="265"/>
             <p14:sldId id="266"/>
             <p14:sldId id="267"/>
           </p14:sldIdLst>
         </p14:section>
-        <p14:section name="정리" id="{91f8d1cc-9e1d-2485-60d9-8e3c26bebb3e}">
+        <p14:section name="정리" id="{fd627574-777b-f4c0-ad0e-d88aa98b6830}">
           <p14:sldIdLst>
             <p14:sldId id="268"/>
           </p14:sldIdLst>
         </p14:section>
-        <p14:section name="보충" id="{bbaba4ea-b43b-98a5-df3f-09333abcabb0}">
+        <p14:section name="보충" id="{4ca6da86-5eaa-430b-8ba3-ff9863b0b864}">
           <p14:sldIdLst>
             <p14:sldId id="269"/>
           </p14:sldIdLst>
